--- a/agent-intro.pptx
+++ b/agent-intro.pptx
@@ -1613,7 +1613,7 @@
         <p:spPr>
           <a:xfrm>
             <a:off x="857250" y="9486900"/>
-            <a:ext cx="5334000" cy="171450"/>
+            <a:ext cx="6096000" cy="171450"/>
           </a:xfrm>
           <a:prstGeom prst="rect">
             <a:avLst/>
@@ -1631,7 +1631,7 @@
             <a:r>
               <a:rPr lang="en-US" sz="750" spc="210" kern="0" dirty="0">
                 <a:solidFill>
-                  <a:srgbClr val="454341"/>
+                  <a:srgbClr val="454442"/>
                 </a:solidFill>
                 <a:latin typeface="Montserrat" pitchFamily="34" charset="0"/>
                 <a:ea typeface="Montserrat" pitchFamily="34" charset="-122"/>
